--- a/trencher.pptx
+++ b/trencher.pptx
@@ -203,7 +203,7 @@
           <a:p>
             <a:fld id="{7D4C4E1E-997C-E64F-8950-81FCB5271F2E}" type="datetimeFigureOut">
               <a:rPr lang="en-US" smtClean="0"/>
-              <a:t>4/16/23</a:t>
+              <a:t>4/6/24</a:t>
             </a:fld>
             <a:endParaRPr lang="en-US"/>
           </a:p>
@@ -700,7 +700,7 @@
           <a:lstStyle/>
           <a:p>
             <a:fld id="{16286276-9013-2A43-82D1-BA4685C95117}" type="datetimeFigureOut">
-              <a:t>4/16/23</a:t>
+              <a:t>4/6/24</a:t>
             </a:fld>
             <a:endParaRPr lang="en-US"/>
           </a:p>
@@ -896,7 +896,7 @@
           <a:lstStyle/>
           <a:p>
             <a:fld id="{16286276-9013-2A43-82D1-BA4685C95117}" type="datetimeFigureOut">
-              <a:t>4/16/23</a:t>
+              <a:t>4/6/24</a:t>
             </a:fld>
             <a:endParaRPr lang="en-US"/>
           </a:p>
@@ -1102,7 +1102,7 @@
           <a:lstStyle/>
           <a:p>
             <a:fld id="{16286276-9013-2A43-82D1-BA4685C95117}" type="datetimeFigureOut">
-              <a:t>4/16/23</a:t>
+              <a:t>4/6/24</a:t>
             </a:fld>
             <a:endParaRPr lang="en-US"/>
           </a:p>
@@ -1298,7 +1298,7 @@
           <a:lstStyle/>
           <a:p>
             <a:fld id="{16286276-9013-2A43-82D1-BA4685C95117}" type="datetimeFigureOut">
-              <a:t>4/16/23</a:t>
+              <a:t>4/6/24</a:t>
             </a:fld>
             <a:endParaRPr lang="en-US"/>
           </a:p>
@@ -1571,7 +1571,7 @@
           <a:lstStyle/>
           <a:p>
             <a:fld id="{16286276-9013-2A43-82D1-BA4685C95117}" type="datetimeFigureOut">
-              <a:t>4/16/23</a:t>
+              <a:t>4/6/24</a:t>
             </a:fld>
             <a:endParaRPr lang="en-US"/>
           </a:p>
@@ -1834,7 +1834,7 @@
           <a:lstStyle/>
           <a:p>
             <a:fld id="{16286276-9013-2A43-82D1-BA4685C95117}" type="datetimeFigureOut">
-              <a:t>4/16/23</a:t>
+              <a:t>4/6/24</a:t>
             </a:fld>
             <a:endParaRPr lang="en-US"/>
           </a:p>
@@ -2244,7 +2244,7 @@
           <a:lstStyle/>
           <a:p>
             <a:fld id="{16286276-9013-2A43-82D1-BA4685C95117}" type="datetimeFigureOut">
-              <a:t>4/16/23</a:t>
+              <a:t>4/6/24</a:t>
             </a:fld>
             <a:endParaRPr lang="en-US"/>
           </a:p>
@@ -2383,7 +2383,7 @@
           <a:lstStyle/>
           <a:p>
             <a:fld id="{16286276-9013-2A43-82D1-BA4685C95117}" type="datetimeFigureOut">
-              <a:t>4/16/23</a:t>
+              <a:t>4/6/24</a:t>
             </a:fld>
             <a:endParaRPr lang="en-US"/>
           </a:p>
@@ -2494,7 +2494,7 @@
           <a:lstStyle/>
           <a:p>
             <a:fld id="{16286276-9013-2A43-82D1-BA4685C95117}" type="datetimeFigureOut">
-              <a:t>4/16/23</a:t>
+              <a:t>4/6/24</a:t>
             </a:fld>
             <a:endParaRPr lang="en-US"/>
           </a:p>
@@ -2803,7 +2803,7 @@
           <a:lstStyle/>
           <a:p>
             <a:fld id="{16286276-9013-2A43-82D1-BA4685C95117}" type="datetimeFigureOut">
-              <a:t>4/16/23</a:t>
+              <a:t>4/6/24</a:t>
             </a:fld>
             <a:endParaRPr lang="en-US"/>
           </a:p>
@@ -3089,7 +3089,7 @@
           <a:lstStyle/>
           <a:p>
             <a:fld id="{16286276-9013-2A43-82D1-BA4685C95117}" type="datetimeFigureOut">
-              <a:t>4/16/23</a:t>
+              <a:t>4/6/24</a:t>
             </a:fld>
             <a:endParaRPr lang="en-US"/>
           </a:p>
@@ -3328,7 +3328,7 @@
           </a:lstStyle>
           <a:p>
             <a:fld id="{16286276-9013-2A43-82D1-BA4685C95117}" type="datetimeFigureOut">
-              <a:t>4/16/23</a:t>
+              <a:t>4/6/24</a:t>
             </a:fld>
             <a:endParaRPr lang="en-US"/>
           </a:p>
@@ -3758,8 +3758,8 @@
         </p:nvSpPr>
         <p:spPr>
           <a:xfrm>
-            <a:off x="2743201" y="1650124"/>
-            <a:ext cx="6253654" cy="923330"/>
+            <a:off x="170329" y="144054"/>
+            <a:ext cx="2330824" cy="461665"/>
           </a:xfrm>
           <a:prstGeom prst="rect">
             <a:avLst/>
@@ -3774,7 +3774,7 @@
           <a:p>
             <a:pPr algn="ctr"/>
             <a:r>
-              <a:rPr lang="en-US" sz="5400" dirty="0"/>
+              <a:rPr lang="en-US" sz="2400" dirty="0"/>
               <a:t>Make a Trench</a:t>
             </a:r>
           </a:p>
@@ -3794,8 +3794,8 @@
         </p:nvSpPr>
         <p:spPr>
           <a:xfrm>
-            <a:off x="4772997" y="2889005"/>
-            <a:ext cx="3036190" cy="1815882"/>
+            <a:off x="656182" y="757572"/>
+            <a:ext cx="3036190" cy="1200329"/>
           </a:xfrm>
           <a:prstGeom prst="rect">
             <a:avLst/>
@@ -3813,7 +3813,7 @@
               <a:buChar char="•"/>
             </a:pPr>
             <a:r>
-              <a:rPr lang="en-US" sz="2800" dirty="0"/>
+              <a:rPr lang="en-US" dirty="0"/>
               <a:t>Plow (Plough)</a:t>
             </a:r>
           </a:p>
@@ -3823,7 +3823,7 @@
               <a:buChar char="•"/>
             </a:pPr>
             <a:r>
-              <a:rPr lang="en-US" sz="2800" dirty="0"/>
+              <a:rPr lang="en-US" dirty="0"/>
               <a:t>Subsoiler </a:t>
             </a:r>
           </a:p>
@@ -3833,11 +3833,11 @@
               <a:buChar char="•"/>
             </a:pPr>
             <a:r>
-              <a:rPr lang="en-US" sz="2800" dirty="0" err="1"/>
+              <a:rPr lang="en-US" dirty="0" err="1"/>
               <a:t>Middlebuster</a:t>
             </a:r>
             <a:r>
-              <a:rPr lang="en-US" sz="2800" dirty="0"/>
+              <a:rPr lang="en-US" dirty="0"/>
               <a:t> </a:t>
             </a:r>
           </a:p>
@@ -3847,7 +3847,7 @@
               <a:buChar char="•"/>
             </a:pPr>
             <a:r>
-              <a:rPr lang="en-US" sz="2800" dirty="0"/>
+              <a:rPr lang="en-US" dirty="0"/>
               <a:t>Tiller</a:t>
             </a:r>
           </a:p>
@@ -3927,7 +3927,7 @@
         </p:blipFill>
         <p:spPr bwMode="auto">
           <a:xfrm>
-            <a:off x="9175532" y="1508953"/>
+            <a:off x="9019991" y="1508953"/>
             <a:ext cx="2898378" cy="2129002"/>
           </a:xfrm>
           <a:prstGeom prst="rect">
@@ -3974,8 +3974,324 @@
         </p:blipFill>
         <p:spPr bwMode="auto">
           <a:xfrm>
-            <a:off x="283779" y="3995272"/>
+            <a:off x="118090" y="3920297"/>
             <a:ext cx="3408593" cy="2782525"/>
+          </a:xfrm>
+          <a:prstGeom prst="rect">
+            <a:avLst/>
+          </a:prstGeom>
+          <a:noFill/>
+          <a:extLst>
+            <a:ext uri="{909E8E84-426E-40DD-AFC4-6F175D3DCCD1}">
+              <a14:hiddenFill xmlns:a14="http://schemas.microsoft.com/office/drawing/2010/main">
+                <a:solidFill>
+                  <a:srgbClr val="FFFFFF"/>
+                </a:solidFill>
+              </a14:hiddenFill>
+            </a:ext>
+          </a:extLst>
+        </p:spPr>
+      </p:pic>
+      <p:sp>
+        <p:nvSpPr>
+          <p:cNvPr id="4" name="TextBox 3">
+            <a:extLst>
+              <a:ext uri="{FF2B5EF4-FFF2-40B4-BE49-F238E27FC236}">
+                <a16:creationId xmlns:a16="http://schemas.microsoft.com/office/drawing/2014/main" id="{62EFEA01-649B-A255-C4BB-F6E8B7FC02D2}"/>
+              </a:ext>
+            </a:extLst>
+          </p:cNvPr>
+          <p:cNvSpPr txBox="1"/>
+          <p:nvPr/>
+        </p:nvSpPr>
+        <p:spPr>
+          <a:xfrm>
+            <a:off x="3155577" y="96501"/>
+            <a:ext cx="4392705" cy="830997"/>
+          </a:xfrm>
+          <a:prstGeom prst="rect">
+            <a:avLst/>
+          </a:prstGeom>
+          <a:noFill/>
+        </p:spPr>
+        <p:txBody>
+          <a:bodyPr wrap="square" rtlCol="0">
+            <a:spAutoFit/>
+          </a:bodyPr>
+          <a:lstStyle/>
+          <a:p>
+            <a:r>
+              <a:rPr lang="en-US" sz="1600" b="0" i="0" dirty="0">
+                <a:solidFill>
+                  <a:srgbClr val="1F1F1F"/>
+                </a:solidFill>
+                <a:effectLst/>
+                <a:highlight>
+                  <a:srgbClr val="FFFFFF"/>
+                </a:highlight>
+                <a:latin typeface="Google Sans"/>
+              </a:rPr>
+              <a:t>A </a:t>
+            </a:r>
+            <a:r>
+              <a:rPr lang="en-US" sz="1600" b="1" i="0" dirty="0">
+                <a:solidFill>
+                  <a:srgbClr val="FF0000"/>
+                </a:solidFill>
+                <a:effectLst/>
+                <a:highlight>
+                  <a:srgbClr val="FFFFFF"/>
+                </a:highlight>
+                <a:latin typeface="Google Sans"/>
+              </a:rPr>
+              <a:t>moldboard</a:t>
+            </a:r>
+            <a:r>
+              <a:rPr lang="en-US" sz="1600" b="0" i="0" dirty="0">
+                <a:solidFill>
+                  <a:srgbClr val="1F1F1F"/>
+                </a:solidFill>
+                <a:effectLst/>
+                <a:highlight>
+                  <a:srgbClr val="FFFFFF"/>
+                </a:highlight>
+                <a:latin typeface="Google Sans"/>
+              </a:rPr>
+              <a:t> is the curved part of a plow that cuts into the soil, lifts it, and turns it over. It's a fundamental component in traditional plows.</a:t>
+            </a:r>
+            <a:endParaRPr lang="en-US" sz="1600" dirty="0"/>
+          </a:p>
+        </p:txBody>
+      </p:sp>
+      <p:pic>
+        <p:nvPicPr>
+          <p:cNvPr id="1026" name="Picture 2" descr="Moldboard Plow | Monticello">
+            <a:extLst>
+              <a:ext uri="{FF2B5EF4-FFF2-40B4-BE49-F238E27FC236}">
+                <a16:creationId xmlns:a16="http://schemas.microsoft.com/office/drawing/2014/main" id="{15D2A44E-5170-831D-99B9-1507B01F5523}"/>
+              </a:ext>
+            </a:extLst>
+          </p:cNvPr>
+          <p:cNvPicPr>
+            <a:picLocks noChangeAspect="1" noChangeArrowheads="1"/>
+          </p:cNvPicPr>
+          <p:nvPr/>
+        </p:nvPicPr>
+        <p:blipFill>
+          <a:blip r:embed="rId5" cstate="email">
+            <a:extLst>
+              <a:ext uri="{28A0092B-C50C-407E-A947-70E740481C1C}">
+                <a14:useLocalDpi xmlns:a14="http://schemas.microsoft.com/office/drawing/2010/main"/>
+              </a:ext>
+            </a:extLst>
+          </a:blip>
+          <a:srcRect/>
+          <a:stretch>
+            <a:fillRect/>
+          </a:stretch>
+        </p:blipFill>
+        <p:spPr bwMode="auto">
+          <a:xfrm>
+            <a:off x="8561294" y="167453"/>
+            <a:ext cx="3357075" cy="1200329"/>
+          </a:xfrm>
+          <a:prstGeom prst="rect">
+            <a:avLst/>
+          </a:prstGeom>
+          <a:noFill/>
+          <a:extLst>
+            <a:ext uri="{909E8E84-426E-40DD-AFC4-6F175D3DCCD1}">
+              <a14:hiddenFill xmlns:a14="http://schemas.microsoft.com/office/drawing/2010/main">
+                <a:solidFill>
+                  <a:srgbClr val="FFFFFF"/>
+                </a:solidFill>
+              </a14:hiddenFill>
+            </a:ext>
+          </a:extLst>
+        </p:spPr>
+      </p:pic>
+      <p:pic>
+        <p:nvPicPr>
+          <p:cNvPr id="1030" name="Picture 6" descr="Quadivator UTV 2-bottom Plow">
+            <a:extLst>
+              <a:ext uri="{FF2B5EF4-FFF2-40B4-BE49-F238E27FC236}">
+                <a16:creationId xmlns:a16="http://schemas.microsoft.com/office/drawing/2014/main" id="{9C00F634-3D08-D208-2FF6-D203E06F0BA7}"/>
+              </a:ext>
+            </a:extLst>
+          </p:cNvPr>
+          <p:cNvPicPr>
+            <a:picLocks noChangeAspect="1" noChangeArrowheads="1"/>
+          </p:cNvPicPr>
+          <p:nvPr/>
+        </p:nvPicPr>
+        <p:blipFill>
+          <a:blip r:embed="rId6" cstate="email">
+            <a:extLst>
+              <a:ext uri="{28A0092B-C50C-407E-A947-70E740481C1C}">
+                <a14:useLocalDpi xmlns:a14="http://schemas.microsoft.com/office/drawing/2010/main"/>
+              </a:ext>
+            </a:extLst>
+          </a:blip>
+          <a:srcRect/>
+          <a:stretch>
+            <a:fillRect/>
+          </a:stretch>
+        </p:blipFill>
+        <p:spPr bwMode="auto">
+          <a:xfrm>
+            <a:off x="3807322" y="927498"/>
+            <a:ext cx="3089213" cy="2316910"/>
+          </a:xfrm>
+          <a:prstGeom prst="rect">
+            <a:avLst/>
+          </a:prstGeom>
+          <a:noFill/>
+          <a:extLst>
+            <a:ext uri="{909E8E84-426E-40DD-AFC4-6F175D3DCCD1}">
+              <a14:hiddenFill xmlns:a14="http://schemas.microsoft.com/office/drawing/2010/main">
+                <a:solidFill>
+                  <a:srgbClr val="FFFFFF"/>
+                </a:solidFill>
+              </a14:hiddenFill>
+            </a:ext>
+          </a:extLst>
+        </p:spPr>
+      </p:pic>
+      <p:sp>
+        <p:nvSpPr>
+          <p:cNvPr id="5" name="TextBox 4">
+            <a:extLst>
+              <a:ext uri="{FF2B5EF4-FFF2-40B4-BE49-F238E27FC236}">
+                <a16:creationId xmlns:a16="http://schemas.microsoft.com/office/drawing/2014/main" id="{7C4694DB-99C1-36F5-6C54-6D39382457F4}"/>
+              </a:ext>
+            </a:extLst>
+          </p:cNvPr>
+          <p:cNvSpPr txBox="1"/>
+          <p:nvPr/>
+        </p:nvSpPr>
+        <p:spPr>
+          <a:xfrm>
+            <a:off x="4642223" y="3299401"/>
+            <a:ext cx="1651001" cy="584775"/>
+          </a:xfrm>
+          <a:prstGeom prst="rect">
+            <a:avLst/>
+          </a:prstGeom>
+          <a:noFill/>
+        </p:spPr>
+        <p:txBody>
+          <a:bodyPr wrap="square" rtlCol="0">
+            <a:spAutoFit/>
+          </a:bodyPr>
+          <a:lstStyle/>
+          <a:p>
+            <a:pPr algn="ctr"/>
+            <a:r>
+              <a:rPr lang="en-US" sz="1600" b="0" i="0" dirty="0">
+                <a:solidFill>
+                  <a:srgbClr val="1F1F1F"/>
+                </a:solidFill>
+                <a:effectLst/>
+                <a:highlight>
+                  <a:srgbClr val="FFFFFF"/>
+                </a:highlight>
+                <a:latin typeface="Google Sans"/>
+              </a:rPr>
+              <a:t>Tow behind plow</a:t>
+            </a:r>
+          </a:p>
+          <a:p>
+            <a:pPr algn="ctr"/>
+            <a:r>
+              <a:rPr lang="en-US" sz="1600" dirty="0">
+                <a:solidFill>
+                  <a:srgbClr val="1F1F1F"/>
+                </a:solidFill>
+                <a:highlight>
+                  <a:srgbClr val="FFFFFF"/>
+                </a:highlight>
+                <a:latin typeface="Google Sans"/>
+              </a:rPr>
+              <a:t>bottom plow</a:t>
+            </a:r>
+            <a:endParaRPr lang="en-US" sz="1600" dirty="0"/>
+          </a:p>
+        </p:txBody>
+      </p:sp>
+      <p:sp>
+        <p:nvSpPr>
+          <p:cNvPr id="8" name="TextBox 7">
+            <a:extLst>
+              <a:ext uri="{FF2B5EF4-FFF2-40B4-BE49-F238E27FC236}">
+                <a16:creationId xmlns:a16="http://schemas.microsoft.com/office/drawing/2014/main" id="{0DAE3DBE-EF30-B799-B7D0-6B37652C6C1D}"/>
+              </a:ext>
+            </a:extLst>
+          </p:cNvPr>
+          <p:cNvSpPr txBox="1"/>
+          <p:nvPr/>
+        </p:nvSpPr>
+        <p:spPr>
+          <a:xfrm>
+            <a:off x="4721784" y="5761225"/>
+            <a:ext cx="1981200" cy="338554"/>
+          </a:xfrm>
+          <a:prstGeom prst="rect">
+            <a:avLst/>
+          </a:prstGeom>
+          <a:noFill/>
+        </p:spPr>
+        <p:txBody>
+          <a:bodyPr wrap="square" rtlCol="0">
+            <a:spAutoFit/>
+          </a:bodyPr>
+          <a:lstStyle/>
+          <a:p>
+            <a:r>
+              <a:rPr lang="en-US" sz="1600" b="0" i="0" dirty="0">
+                <a:solidFill>
+                  <a:srgbClr val="1F1F1F"/>
+                </a:solidFill>
+                <a:effectLst/>
+                <a:highlight>
+                  <a:srgbClr val="FFFFFF"/>
+                </a:highlight>
+                <a:latin typeface="Google Sans"/>
+              </a:rPr>
+              <a:t>Large Grappling Hook</a:t>
+            </a:r>
+            <a:endParaRPr lang="en-US" sz="1600" dirty="0"/>
+          </a:p>
+        </p:txBody>
+      </p:sp>
+      <p:pic>
+        <p:nvPicPr>
+          <p:cNvPr id="1032" name="Picture 8" descr="Large Grappling Hook, 4-Claw Folding Stainless Steel Grapple Hooks for  Outdoor Survival, Camping, Hiking, Tree &amp;Mountain Climbing">
+            <a:extLst>
+              <a:ext uri="{FF2B5EF4-FFF2-40B4-BE49-F238E27FC236}">
+                <a16:creationId xmlns:a16="http://schemas.microsoft.com/office/drawing/2014/main" id="{F7771D53-9D14-B062-575B-5ABEC9516D1D}"/>
+              </a:ext>
+            </a:extLst>
+          </p:cNvPr>
+          <p:cNvPicPr>
+            <a:picLocks noChangeAspect="1" noChangeArrowheads="1"/>
+          </p:cNvPicPr>
+          <p:nvPr/>
+        </p:nvPicPr>
+        <p:blipFill rotWithShape="1">
+          <a:blip r:embed="rId7" cstate="email">
+            <a:extLst>
+              <a:ext uri="{28A0092B-C50C-407E-A947-70E740481C1C}">
+                <a14:useLocalDpi xmlns:a14="http://schemas.microsoft.com/office/drawing/2010/main"/>
+              </a:ext>
+            </a:extLst>
+          </a:blip>
+          <a:srcRect/>
+          <a:stretch/>
+        </p:blipFill>
+        <p:spPr bwMode="auto">
+          <a:xfrm>
+            <a:off x="4886884" y="4395381"/>
+            <a:ext cx="1651001" cy="1315137"/>
           </a:xfrm>
           <a:prstGeom prst="rect">
             <a:avLst/>
@@ -4036,8 +4352,8 @@
         </p:nvSpPr>
         <p:spPr>
           <a:xfrm>
-            <a:off x="0" y="0"/>
-            <a:ext cx="5749159" cy="523220"/>
+            <a:off x="1745621" y="3136612"/>
+            <a:ext cx="2145061" cy="584775"/>
           </a:xfrm>
           <a:prstGeom prst="rect">
             <a:avLst/>
@@ -4051,7 +4367,7 @@
           <a:lstStyle/>
           <a:p>
             <a:r>
-              <a:rPr lang="en-US" sz="2800" dirty="0"/>
+              <a:rPr lang="en-US" sz="1600" dirty="0"/>
               <a:t>Middle Buster (shallow) tow behind</a:t>
             </a:r>
           </a:p>
@@ -4219,7 +4535,7 @@
         </p:blipFill>
         <p:spPr bwMode="auto">
           <a:xfrm>
-            <a:off x="3931443" y="808839"/>
+            <a:off x="5218840" y="1650091"/>
             <a:ext cx="1754319" cy="1358900"/>
           </a:xfrm>
           <a:prstGeom prst="rect">
@@ -4380,8 +4696,8 @@
         </p:blipFill>
         <p:spPr>
           <a:xfrm>
-            <a:off x="2707793" y="3536031"/>
-            <a:ext cx="4598000" cy="2308461"/>
+            <a:off x="84227" y="4426169"/>
+            <a:ext cx="3578652" cy="1796690"/>
           </a:xfrm>
           <a:prstGeom prst="rect">
             <a:avLst/>
@@ -4402,7 +4718,7 @@
         </p:nvSpPr>
         <p:spPr>
           <a:xfrm>
-            <a:off x="3931443" y="5844492"/>
+            <a:off x="710571" y="6376746"/>
             <a:ext cx="2070100" cy="369332"/>
           </a:xfrm>
           <a:prstGeom prst="rect">
@@ -4423,6 +4739,88 @@
           </a:p>
         </p:txBody>
       </p:sp>
+      <p:sp>
+        <p:nvSpPr>
+          <p:cNvPr id="6" name="TextBox 5">
+            <a:extLst>
+              <a:ext uri="{FF2B5EF4-FFF2-40B4-BE49-F238E27FC236}">
+                <a16:creationId xmlns:a16="http://schemas.microsoft.com/office/drawing/2014/main" id="{C23E15A9-0087-272F-B553-9B284AE0E915}"/>
+              </a:ext>
+            </a:extLst>
+          </p:cNvPr>
+          <p:cNvSpPr txBox="1"/>
+          <p:nvPr/>
+        </p:nvSpPr>
+        <p:spPr>
+          <a:xfrm>
+            <a:off x="5036716" y="6122141"/>
+            <a:ext cx="2392885" cy="369332"/>
+          </a:xfrm>
+          <a:prstGeom prst="rect">
+            <a:avLst/>
+          </a:prstGeom>
+          <a:noFill/>
+        </p:spPr>
+        <p:txBody>
+          <a:bodyPr wrap="square" rtlCol="0">
+            <a:spAutoFit/>
+          </a:bodyPr>
+          <a:lstStyle/>
+          <a:p>
+            <a:r>
+              <a:rPr lang="en-US" dirty="0"/>
+              <a:t>ATV garden plow</a:t>
+            </a:r>
+          </a:p>
+        </p:txBody>
+      </p:sp>
+      <p:pic>
+        <p:nvPicPr>
+          <p:cNvPr id="2050" name="Picture 2" descr="Furrow plough: Two bottom plow (ATV/UTV implements) – Iron Baltic">
+            <a:extLst>
+              <a:ext uri="{FF2B5EF4-FFF2-40B4-BE49-F238E27FC236}">
+                <a16:creationId xmlns:a16="http://schemas.microsoft.com/office/drawing/2014/main" id="{80654D4B-50F5-BBB6-D63A-3D47FD57BC80}"/>
+              </a:ext>
+            </a:extLst>
+          </p:cNvPr>
+          <p:cNvPicPr>
+            <a:picLocks noChangeAspect="1" noChangeArrowheads="1"/>
+          </p:cNvPicPr>
+          <p:nvPr/>
+        </p:nvPicPr>
+        <p:blipFill>
+          <a:blip r:embed="rId8" cstate="email">
+            <a:extLst>
+              <a:ext uri="{28A0092B-C50C-407E-A947-70E740481C1C}">
+                <a14:useLocalDpi xmlns:a14="http://schemas.microsoft.com/office/drawing/2010/main"/>
+              </a:ext>
+            </a:extLst>
+          </a:blip>
+          <a:srcRect/>
+          <a:stretch>
+            <a:fillRect/>
+          </a:stretch>
+        </p:blipFill>
+        <p:spPr bwMode="auto">
+          <a:xfrm>
+            <a:off x="4691529" y="4015435"/>
+            <a:ext cx="2808941" cy="2106706"/>
+          </a:xfrm>
+          <a:prstGeom prst="rect">
+            <a:avLst/>
+          </a:prstGeom>
+          <a:noFill/>
+          <a:extLst>
+            <a:ext uri="{909E8E84-426E-40DD-AFC4-6F175D3DCCD1}">
+              <a14:hiddenFill xmlns:a14="http://schemas.microsoft.com/office/drawing/2010/main">
+                <a:solidFill>
+                  <a:srgbClr val="FFFFFF"/>
+                </a:solidFill>
+              </a14:hiddenFill>
+            </a:ext>
+          </a:extLst>
+        </p:spPr>
+      </p:pic>
     </p:spTree>
     <p:extLst>
       <p:ext uri="{BB962C8B-B14F-4D97-AF65-F5344CB8AC3E}">
@@ -5457,17 +5855,12 @@
           <a:lstStyle/>
           <a:p>
             <a:r>
-              <a:rPr lang="en-US" dirty="0"/>
-              <a:t>https://</a:t>
-            </a:r>
-            <a:r>
-              <a:rPr lang="en-US" dirty="0" err="1"/>
-              <a:t>www.bcsamerica.com</a:t>
-            </a:r>
-            <a:r>
-              <a:rPr lang="en-US" dirty="0"/>
-              <a:t>/products/tractors</a:t>
-            </a:r>
+              <a:rPr lang="en-US" dirty="0">
+                <a:hlinkClick r:id="rId2"/>
+              </a:rPr>
+              <a:t>https://www.bcsamerica.com/products/tractors</a:t>
+            </a:r>
+            <a:endParaRPr lang="en-US" dirty="0"/>
           </a:p>
         </p:txBody>
       </p:sp>
@@ -5512,91 +5905,6 @@
             <a:extLst>
               <a:ext uri="{FF2B5EF4-FFF2-40B4-BE49-F238E27FC236}">
                 <a16:creationId xmlns:a16="http://schemas.microsoft.com/office/drawing/2014/main" id="{C2620704-5851-144B-401C-6F34C2450ABA}"/>
-              </a:ext>
-            </a:extLst>
-          </p:cNvPr>
-          <p:cNvPicPr>
-            <a:picLocks noChangeAspect="1"/>
-          </p:cNvPicPr>
-          <p:nvPr/>
-        </p:nvPicPr>
-        <p:blipFill>
-          <a:blip r:embed="rId2" cstate="email">
-            <a:extLst>
-              <a:ext uri="{28A0092B-C50C-407E-A947-70E740481C1C}">
-                <a14:useLocalDpi xmlns:a14="http://schemas.microsoft.com/office/drawing/2010/main"/>
-              </a:ext>
-            </a:extLst>
-          </a:blip>
-          <a:stretch>
-            <a:fillRect/>
-          </a:stretch>
-        </p:blipFill>
-        <p:spPr>
-          <a:xfrm>
-            <a:off x="408213" y="2064572"/>
-            <a:ext cx="5426529" cy="3656336"/>
-          </a:xfrm>
-          <a:prstGeom prst="rect">
-            <a:avLst/>
-          </a:prstGeom>
-        </p:spPr>
-      </p:pic>
-      <p:sp>
-        <p:nvSpPr>
-          <p:cNvPr id="7" name="TextBox 6">
-            <a:extLst>
-              <a:ext uri="{FF2B5EF4-FFF2-40B4-BE49-F238E27FC236}">
-                <a16:creationId xmlns:a16="http://schemas.microsoft.com/office/drawing/2014/main" id="{8FF48237-05EF-11AB-C76C-CA28CAD76250}"/>
-              </a:ext>
-            </a:extLst>
-          </p:cNvPr>
-          <p:cNvSpPr txBox="1"/>
-          <p:nvPr/>
-        </p:nvSpPr>
-        <p:spPr>
-          <a:xfrm>
-            <a:off x="6449786" y="849086"/>
-            <a:ext cx="4392385" cy="923330"/>
-          </a:xfrm>
-          <a:prstGeom prst="rect">
-            <a:avLst/>
-          </a:prstGeom>
-          <a:noFill/>
-        </p:spPr>
-        <p:txBody>
-          <a:bodyPr wrap="square" rtlCol="0">
-            <a:spAutoFit/>
-          </a:bodyPr>
-          <a:lstStyle/>
-          <a:p>
-            <a:r>
-              <a:rPr lang="en-US" dirty="0"/>
-              <a:t>Walk-behind tractors, various attachments</a:t>
-            </a:r>
-          </a:p>
-          <a:p>
-            <a:r>
-              <a:rPr lang="en-US" dirty="0"/>
-              <a:t>(tiler, roller, plow, spreader, </a:t>
-            </a:r>
-            <a:r>
-              <a:rPr lang="en-US" dirty="0" err="1"/>
-              <a:t>ridger</a:t>
-            </a:r>
-            <a:r>
-              <a:rPr lang="en-US" dirty="0"/>
-              <a:t>, rotary plow, subsoiler, cultivator, brush mower, etc.</a:t>
-            </a:r>
-          </a:p>
-        </p:txBody>
-      </p:sp>
-      <p:pic>
-        <p:nvPicPr>
-          <p:cNvPr id="8" name="Picture 7">
-            <a:extLst>
-              <a:ext uri="{FF2B5EF4-FFF2-40B4-BE49-F238E27FC236}">
-                <a16:creationId xmlns:a16="http://schemas.microsoft.com/office/drawing/2014/main" id="{49D26F63-C6B4-2804-22A2-DEA81CEAF145}"/>
               </a:ext>
             </a:extLst>
           </p:cNvPr>
@@ -5607,6 +5915,91 @@
         </p:nvPicPr>
         <p:blipFill>
           <a:blip r:embed="rId3" cstate="email">
+            <a:extLst>
+              <a:ext uri="{28A0092B-C50C-407E-A947-70E740481C1C}">
+                <a14:useLocalDpi xmlns:a14="http://schemas.microsoft.com/office/drawing/2010/main"/>
+              </a:ext>
+            </a:extLst>
+          </a:blip>
+          <a:stretch>
+            <a:fillRect/>
+          </a:stretch>
+        </p:blipFill>
+        <p:spPr>
+          <a:xfrm>
+            <a:off x="408213" y="2064572"/>
+            <a:ext cx="5426529" cy="3656336"/>
+          </a:xfrm>
+          <a:prstGeom prst="rect">
+            <a:avLst/>
+          </a:prstGeom>
+        </p:spPr>
+      </p:pic>
+      <p:sp>
+        <p:nvSpPr>
+          <p:cNvPr id="7" name="TextBox 6">
+            <a:extLst>
+              <a:ext uri="{FF2B5EF4-FFF2-40B4-BE49-F238E27FC236}">
+                <a16:creationId xmlns:a16="http://schemas.microsoft.com/office/drawing/2014/main" id="{8FF48237-05EF-11AB-C76C-CA28CAD76250}"/>
+              </a:ext>
+            </a:extLst>
+          </p:cNvPr>
+          <p:cNvSpPr txBox="1"/>
+          <p:nvPr/>
+        </p:nvSpPr>
+        <p:spPr>
+          <a:xfrm>
+            <a:off x="6449786" y="849086"/>
+            <a:ext cx="4392385" cy="923330"/>
+          </a:xfrm>
+          <a:prstGeom prst="rect">
+            <a:avLst/>
+          </a:prstGeom>
+          <a:noFill/>
+        </p:spPr>
+        <p:txBody>
+          <a:bodyPr wrap="square" rtlCol="0">
+            <a:spAutoFit/>
+          </a:bodyPr>
+          <a:lstStyle/>
+          <a:p>
+            <a:r>
+              <a:rPr lang="en-US" dirty="0"/>
+              <a:t>Walk-behind tractors, various attachments</a:t>
+            </a:r>
+          </a:p>
+          <a:p>
+            <a:r>
+              <a:rPr lang="en-US" dirty="0"/>
+              <a:t>(tiler, roller, plow, spreader, </a:t>
+            </a:r>
+            <a:r>
+              <a:rPr lang="en-US" dirty="0" err="1"/>
+              <a:t>ridger</a:t>
+            </a:r>
+            <a:r>
+              <a:rPr lang="en-US" dirty="0"/>
+              <a:t>, rotary plow, subsoiler, cultivator, brush mower, etc.</a:t>
+            </a:r>
+          </a:p>
+        </p:txBody>
+      </p:sp>
+      <p:pic>
+        <p:nvPicPr>
+          <p:cNvPr id="8" name="Picture 7">
+            <a:extLst>
+              <a:ext uri="{FF2B5EF4-FFF2-40B4-BE49-F238E27FC236}">
+                <a16:creationId xmlns:a16="http://schemas.microsoft.com/office/drawing/2014/main" id="{49D26F63-C6B4-2804-22A2-DEA81CEAF145}"/>
+              </a:ext>
+            </a:extLst>
+          </p:cNvPr>
+          <p:cNvPicPr>
+            <a:picLocks noChangeAspect="1"/>
+          </p:cNvPicPr>
+          <p:nvPr/>
+        </p:nvPicPr>
+        <p:blipFill>
+          <a:blip r:embed="rId4" cstate="email">
             <a:extLst>
               <a:ext uri="{28A0092B-C50C-407E-A947-70E740481C1C}">
                 <a14:useLocalDpi xmlns:a14="http://schemas.microsoft.com/office/drawing/2010/main"/>
